--- a/Presentacion_PLN_SentimientosAnime.pptx
+++ b/Presentacion_PLN_SentimientosAnime.pptx
@@ -310,7 +310,7 @@
           <a:p>
             <a:fld id="{5BCAD085-E8A6-8845-BD4E-CB4CCA059FC4}" type="datetimeFigureOut">
               <a:rPr lang="en-US" smtClean="0"/>
-              <a:t>5/25/2026</a:t>
+              <a:t>5/26/2026</a:t>
             </a:fld>
             <a:endParaRPr lang="en-US"/>
           </a:p>
@@ -478,7 +478,7 @@
           <a:p>
             <a:fld id="{5BCAD085-E8A6-8845-BD4E-CB4CCA059FC4}" type="datetimeFigureOut">
               <a:rPr lang="en-US" smtClean="0"/>
-              <a:t>5/25/2026</a:t>
+              <a:t>5/26/2026</a:t>
             </a:fld>
             <a:endParaRPr lang="en-US"/>
           </a:p>
@@ -656,7 +656,7 @@
           <a:p>
             <a:fld id="{5BCAD085-E8A6-8845-BD4E-CB4CCA059FC4}" type="datetimeFigureOut">
               <a:rPr lang="en-US" smtClean="0"/>
-              <a:t>5/25/2026</a:t>
+              <a:t>5/26/2026</a:t>
             </a:fld>
             <a:endParaRPr lang="en-US"/>
           </a:p>
@@ -824,7 +824,7 @@
           <a:p>
             <a:fld id="{5BCAD085-E8A6-8845-BD4E-CB4CCA059FC4}" type="datetimeFigureOut">
               <a:rPr lang="en-US" smtClean="0"/>
-              <a:t>5/25/2026</a:t>
+              <a:t>5/26/2026</a:t>
             </a:fld>
             <a:endParaRPr lang="en-US"/>
           </a:p>
@@ -1069,7 +1069,7 @@
           <a:p>
             <a:fld id="{5BCAD085-E8A6-8845-BD4E-CB4CCA059FC4}" type="datetimeFigureOut">
               <a:rPr lang="en-US" smtClean="0"/>
-              <a:t>5/25/2026</a:t>
+              <a:t>5/26/2026</a:t>
             </a:fld>
             <a:endParaRPr lang="en-US"/>
           </a:p>
@@ -1354,7 +1354,7 @@
           <a:p>
             <a:fld id="{5BCAD085-E8A6-8845-BD4E-CB4CCA059FC4}" type="datetimeFigureOut">
               <a:rPr lang="en-US" smtClean="0"/>
-              <a:t>5/25/2026</a:t>
+              <a:t>5/26/2026</a:t>
             </a:fld>
             <a:endParaRPr lang="en-US"/>
           </a:p>
@@ -1773,7 +1773,7 @@
           <a:p>
             <a:fld id="{5BCAD085-E8A6-8845-BD4E-CB4CCA059FC4}" type="datetimeFigureOut">
               <a:rPr lang="en-US" smtClean="0"/>
-              <a:t>5/25/2026</a:t>
+              <a:t>5/26/2026</a:t>
             </a:fld>
             <a:endParaRPr lang="en-US"/>
           </a:p>
@@ -1890,7 +1890,7 @@
           <a:p>
             <a:fld id="{5BCAD085-E8A6-8845-BD4E-CB4CCA059FC4}" type="datetimeFigureOut">
               <a:rPr lang="en-US" smtClean="0"/>
-              <a:t>5/25/2026</a:t>
+              <a:t>5/26/2026</a:t>
             </a:fld>
             <a:endParaRPr lang="en-US"/>
           </a:p>
@@ -1985,7 +1985,7 @@
           <a:p>
             <a:fld id="{5BCAD085-E8A6-8845-BD4E-CB4CCA059FC4}" type="datetimeFigureOut">
               <a:rPr lang="en-US" smtClean="0"/>
-              <a:t>5/25/2026</a:t>
+              <a:t>5/26/2026</a:t>
             </a:fld>
             <a:endParaRPr lang="en-US"/>
           </a:p>
@@ -2260,7 +2260,7 @@
           <a:p>
             <a:fld id="{5BCAD085-E8A6-8845-BD4E-CB4CCA059FC4}" type="datetimeFigureOut">
               <a:rPr lang="en-US" smtClean="0"/>
-              <a:t>5/25/2026</a:t>
+              <a:t>5/26/2026</a:t>
             </a:fld>
             <a:endParaRPr lang="en-US"/>
           </a:p>
@@ -2512,7 +2512,7 @@
           <a:p>
             <a:fld id="{5BCAD085-E8A6-8845-BD4E-CB4CCA059FC4}" type="datetimeFigureOut">
               <a:rPr lang="en-US" smtClean="0"/>
-              <a:t>5/25/2026</a:t>
+              <a:t>5/26/2026</a:t>
             </a:fld>
             <a:endParaRPr lang="en-US"/>
           </a:p>
@@ -2723,7 +2723,7 @@
           <a:p>
             <a:fld id="{5BCAD085-E8A6-8845-BD4E-CB4CCA059FC4}" type="datetimeFigureOut">
               <a:rPr lang="en-US" smtClean="0"/>
-              <a:t>5/25/2026</a:t>
+              <a:t>5/26/2026</a:t>
             </a:fld>
             <a:endParaRPr lang="en-US"/>
           </a:p>
@@ -4665,10 +4665,10 @@
       </p:sp>
       <p:pic>
         <p:nvPicPr>
-          <p:cNvPr id="35" name="Imagen 34">
+          <p:cNvPr id="18" name="Imagen 17">
             <a:extLst>
               <a:ext uri="{FF2B5EF4-FFF2-40B4-BE49-F238E27FC236}">
-                <a16:creationId xmlns:a16="http://schemas.microsoft.com/office/drawing/2014/main" id="{0EC19C4D-C0B4-A623-6418-D97858BDB382}"/>
+                <a16:creationId xmlns:a16="http://schemas.microsoft.com/office/drawing/2014/main" id="{891C25F3-7AC4-EE71-F526-C7DCC1FA96F5}"/>
               </a:ext>
             </a:extLst>
           </p:cNvPr>
@@ -4685,8 +4685,8 @@
         </p:blipFill>
         <p:spPr>
           <a:xfrm>
-            <a:off x="328158" y="2677090"/>
-            <a:ext cx="4061988" cy="2217433"/>
+            <a:off x="502920" y="2764846"/>
+            <a:ext cx="3733800" cy="2041922"/>
           </a:xfrm>
           <a:prstGeom prst="rect">
             <a:avLst/>
@@ -5804,13 +5804,40 @@
               <a:t>~</a:t>
             </a:r>
             <a:r>
+              <a:rPr lang="es-CL" sz="1100" b="1" dirty="0">
+                <a:solidFill>
+                  <a:srgbClr val="55657A"/>
+                </a:solidFill>
+                <a:latin typeface="Calibri"/>
+              </a:rPr>
+              <a:t>91</a:t>
+            </a:r>
+            <a:r>
               <a:rPr lang="es-CL" sz="1100" b="1" i="0" noProof="0" dirty="0">
                 <a:solidFill>
                   <a:srgbClr val="55657A"/>
                 </a:solidFill>
                 <a:latin typeface="Calibri"/>
               </a:rPr>
-              <a:t>70% Positivas / ~30% Negativas</a:t>
+              <a:t>% Positivas / ~</a:t>
+            </a:r>
+            <a:r>
+              <a:rPr lang="es-CL" sz="1100" b="1" dirty="0">
+                <a:solidFill>
+                  <a:srgbClr val="55657A"/>
+                </a:solidFill>
+                <a:latin typeface="Calibri"/>
+              </a:rPr>
+              <a:t>9</a:t>
+            </a:r>
+            <a:r>
+              <a:rPr lang="es-CL" sz="1100" b="1" i="0" noProof="0" dirty="0">
+                <a:solidFill>
+                  <a:srgbClr val="55657A"/>
+                </a:solidFill>
+                <a:latin typeface="Calibri"/>
+              </a:rPr>
+              <a:t>% Negativas</a:t>
             </a:r>
           </a:p>
         </p:txBody>
@@ -6082,25 +6109,7 @@
                 </a:solidFill>
                 <a:latin typeface="Calibri"/>
               </a:rPr>
-              <a:t>Con un dataset desbalanceado el modelo puede lograr alta Accuracy prediciendo siempre la clase mayoritaria. El balanceo 50/50 garantiza que F1, </a:t>
-            </a:r>
-            <a:r>
-              <a:rPr lang="es-CL" sz="1100" b="1" i="0" noProof="0" dirty="0" err="1">
-                <a:solidFill>
-                  <a:srgbClr val="55657A"/>
-                </a:solidFill>
-                <a:latin typeface="Calibri"/>
-              </a:rPr>
-              <a:t>Precision</a:t>
-            </a:r>
-            <a:r>
-              <a:rPr lang="es-CL" sz="1100" b="1" i="0" noProof="0" dirty="0">
-                <a:solidFill>
-                  <a:srgbClr val="55657A"/>
-                </a:solidFill>
-                <a:latin typeface="Calibri"/>
-              </a:rPr>
-              <a:t> y </a:t>
+              <a:t>Con un dataset desbalanceado el modelo puede lograr alta Accuracy prediciendo siempre la clase mayoritaria. El balanceo 50/50 garantiza que F1, Precisión y </a:t>
             </a:r>
             <a:r>
               <a:rPr lang="es-CL" sz="1100" b="1" i="0" noProof="0" dirty="0" err="1">
